--- a/public/videos/repositories/gesenmap/gesenmap-tech-preview.pptx
+++ b/public/videos/repositories/gesenmap/gesenmap-tech-preview.pptx
@@ -134,7 +134,7 @@
           <p:cNvPr id="2" name="タイトル 1">
             <a:extLst>
               <a:ext uri="{FF2B5EF4-FFF2-40B4-BE49-F238E27FC236}">
-                <a16:creationId xmlns:a16="http://schemas.microsoft.com/office/drawing/2014/main" id="{368E8B39-6AF3-76D0-750B-B71A99EF9A71}"/>
+                <a16:creationId xmlns:a16="http://schemas.microsoft.com/office/drawing/2014/main" id="{A1A8DD19-16CE-1076-A237-9DA0420AD013}"/>
               </a:ext>
             </a:extLst>
           </p:cNvPr>
@@ -171,7 +171,7 @@
           <p:cNvPr id="3" name="字幕 2">
             <a:extLst>
               <a:ext uri="{FF2B5EF4-FFF2-40B4-BE49-F238E27FC236}">
-                <a16:creationId xmlns:a16="http://schemas.microsoft.com/office/drawing/2014/main" id="{27BC4B08-15DD-BF0B-AD88-601E895DFB20}"/>
+                <a16:creationId xmlns:a16="http://schemas.microsoft.com/office/drawing/2014/main" id="{CB52900E-EA67-6B97-7F53-7E12AAB75B8B}"/>
               </a:ext>
             </a:extLst>
           </p:cNvPr>
@@ -241,7 +241,7 @@
           <p:cNvPr id="4" name="日付プレースホルダー 3">
             <a:extLst>
               <a:ext uri="{FF2B5EF4-FFF2-40B4-BE49-F238E27FC236}">
-                <a16:creationId xmlns:a16="http://schemas.microsoft.com/office/drawing/2014/main" id="{89A7A418-38BF-2AC1-254E-14961737329C}"/>
+                <a16:creationId xmlns:a16="http://schemas.microsoft.com/office/drawing/2014/main" id="{BC23183D-081A-AB36-E698-770408380F9D}"/>
               </a:ext>
             </a:extLst>
           </p:cNvPr>
@@ -257,7 +257,7 @@
           <a:bodyPr/>
           <a:lstStyle/>
           <a:p>
-            <a:fld id="{3279F086-2EA9-4985-A6A5-A8350F321C5D}" type="datetimeFigureOut">
+            <a:fld id="{64C2380F-06C8-4385-98CA-3B5510F0C678}" type="datetimeFigureOut">
               <a:rPr kumimoji="1" lang="ja-JP" altLang="en-US" smtClean="0"/>
               <a:t>2026/7/30</a:t>
             </a:fld>
@@ -270,7 +270,7 @@
           <p:cNvPr id="5" name="フッター プレースホルダー 4">
             <a:extLst>
               <a:ext uri="{FF2B5EF4-FFF2-40B4-BE49-F238E27FC236}">
-                <a16:creationId xmlns:a16="http://schemas.microsoft.com/office/drawing/2014/main" id="{F5ECCF33-62EC-431F-DA4D-43B2B2DF625F}"/>
+                <a16:creationId xmlns:a16="http://schemas.microsoft.com/office/drawing/2014/main" id="{DD65B5C8-8969-0B6F-7923-59615F6C21B3}"/>
               </a:ext>
             </a:extLst>
           </p:cNvPr>
@@ -295,7 +295,7 @@
           <p:cNvPr id="6" name="スライド番号プレースホルダー 5">
             <a:extLst>
               <a:ext uri="{FF2B5EF4-FFF2-40B4-BE49-F238E27FC236}">
-                <a16:creationId xmlns:a16="http://schemas.microsoft.com/office/drawing/2014/main" id="{97585238-778C-A66D-6472-B63728EF1965}"/>
+                <a16:creationId xmlns:a16="http://schemas.microsoft.com/office/drawing/2014/main" id="{E7495268-3C99-8F4C-AD50-66DCDE75C2D0}"/>
               </a:ext>
             </a:extLst>
           </p:cNvPr>
@@ -311,7 +311,7 @@
           <a:bodyPr/>
           <a:lstStyle/>
           <a:p>
-            <a:fld id="{1DC51C15-53FB-455F-86B6-AABC030D8325}" type="slidenum">
+            <a:fld id="{8383BE86-43FA-4F89-AF80-14BC313F82EA}" type="slidenum">
               <a:rPr kumimoji="1" lang="ja-JP" altLang="en-US" smtClean="0"/>
               <a:t>‹#›</a:t>
             </a:fld>
@@ -322,7 +322,7 @@
     </p:spTree>
     <p:extLst>
       <p:ext uri="{BB962C8B-B14F-4D97-AF65-F5344CB8AC3E}">
-        <p14:creationId xmlns:p14="http://schemas.microsoft.com/office/powerpoint/2010/main" val="1507704260"/>
+        <p14:creationId xmlns:p14="http://schemas.microsoft.com/office/powerpoint/2010/main" val="523523035"/>
       </p:ext>
     </p:extLst>
   </p:cSld>
@@ -354,7 +354,7 @@
           <p:cNvPr id="2" name="タイトル 1">
             <a:extLst>
               <a:ext uri="{FF2B5EF4-FFF2-40B4-BE49-F238E27FC236}">
-                <a16:creationId xmlns:a16="http://schemas.microsoft.com/office/drawing/2014/main" id="{933516E2-17DA-398C-A1AD-F54A8381F6EE}"/>
+                <a16:creationId xmlns:a16="http://schemas.microsoft.com/office/drawing/2014/main" id="{CC8E3031-1353-007C-089E-3B824CF07EE7}"/>
               </a:ext>
             </a:extLst>
           </p:cNvPr>
@@ -382,7 +382,7 @@
           <p:cNvPr id="3" name="縦書きテキスト プレースホルダー 2">
             <a:extLst>
               <a:ext uri="{FF2B5EF4-FFF2-40B4-BE49-F238E27FC236}">
-                <a16:creationId xmlns:a16="http://schemas.microsoft.com/office/drawing/2014/main" id="{5C26460E-026E-F4E4-2B3E-632137667207}"/>
+                <a16:creationId xmlns:a16="http://schemas.microsoft.com/office/drawing/2014/main" id="{89A59A69-C202-EF4F-F906-890475B88B3F}"/>
               </a:ext>
             </a:extLst>
           </p:cNvPr>
@@ -471,7 +471,7 @@
           <p:cNvPr id="4" name="日付プレースホルダー 3">
             <a:extLst>
               <a:ext uri="{FF2B5EF4-FFF2-40B4-BE49-F238E27FC236}">
-                <a16:creationId xmlns:a16="http://schemas.microsoft.com/office/drawing/2014/main" id="{F04FA836-1E9F-E8C5-5243-5ECBB36677E2}"/>
+                <a16:creationId xmlns:a16="http://schemas.microsoft.com/office/drawing/2014/main" id="{A186C33F-AF0E-34DC-D282-DC04D222BA04}"/>
               </a:ext>
             </a:extLst>
           </p:cNvPr>
@@ -487,7 +487,7 @@
           <a:bodyPr/>
           <a:lstStyle/>
           <a:p>
-            <a:fld id="{3279F086-2EA9-4985-A6A5-A8350F321C5D}" type="datetimeFigureOut">
+            <a:fld id="{64C2380F-06C8-4385-98CA-3B5510F0C678}" type="datetimeFigureOut">
               <a:rPr kumimoji="1" lang="ja-JP" altLang="en-US" smtClean="0"/>
               <a:t>2026/7/30</a:t>
             </a:fld>
@@ -500,7 +500,7 @@
           <p:cNvPr id="5" name="フッター プレースホルダー 4">
             <a:extLst>
               <a:ext uri="{FF2B5EF4-FFF2-40B4-BE49-F238E27FC236}">
-                <a16:creationId xmlns:a16="http://schemas.microsoft.com/office/drawing/2014/main" id="{3C5E646C-758B-0D3D-C65A-8D19E253F526}"/>
+                <a16:creationId xmlns:a16="http://schemas.microsoft.com/office/drawing/2014/main" id="{9F76F6F5-B94C-9127-1519-8E342AA1006F}"/>
               </a:ext>
             </a:extLst>
           </p:cNvPr>
@@ -525,7 +525,7 @@
           <p:cNvPr id="6" name="スライド番号プレースホルダー 5">
             <a:extLst>
               <a:ext uri="{FF2B5EF4-FFF2-40B4-BE49-F238E27FC236}">
-                <a16:creationId xmlns:a16="http://schemas.microsoft.com/office/drawing/2014/main" id="{EA19CB2E-F237-79EC-E3FF-4D6EE124B6BF}"/>
+                <a16:creationId xmlns:a16="http://schemas.microsoft.com/office/drawing/2014/main" id="{4D919CC9-86E3-E06D-595F-AC92F302AF29}"/>
               </a:ext>
             </a:extLst>
           </p:cNvPr>
@@ -541,7 +541,7 @@
           <a:bodyPr/>
           <a:lstStyle/>
           <a:p>
-            <a:fld id="{1DC51C15-53FB-455F-86B6-AABC030D8325}" type="slidenum">
+            <a:fld id="{8383BE86-43FA-4F89-AF80-14BC313F82EA}" type="slidenum">
               <a:rPr kumimoji="1" lang="ja-JP" altLang="en-US" smtClean="0"/>
               <a:t>‹#›</a:t>
             </a:fld>
@@ -552,7 +552,7 @@
     </p:spTree>
     <p:extLst>
       <p:ext uri="{BB962C8B-B14F-4D97-AF65-F5344CB8AC3E}">
-        <p14:creationId xmlns:p14="http://schemas.microsoft.com/office/powerpoint/2010/main" val="834324341"/>
+        <p14:creationId xmlns:p14="http://schemas.microsoft.com/office/powerpoint/2010/main" val="213808175"/>
       </p:ext>
     </p:extLst>
   </p:cSld>
@@ -584,7 +584,7 @@
           <p:cNvPr id="2" name="縦書きタイトル 1">
             <a:extLst>
               <a:ext uri="{FF2B5EF4-FFF2-40B4-BE49-F238E27FC236}">
-                <a16:creationId xmlns:a16="http://schemas.microsoft.com/office/drawing/2014/main" id="{88AC910A-159E-1315-4F3D-821672B43DE1}"/>
+                <a16:creationId xmlns:a16="http://schemas.microsoft.com/office/drawing/2014/main" id="{06A55EC5-0A91-6C13-9897-BAC12C66C980}"/>
               </a:ext>
             </a:extLst>
           </p:cNvPr>
@@ -617,7 +617,7 @@
           <p:cNvPr id="3" name="縦書きテキスト プレースホルダー 2">
             <a:extLst>
               <a:ext uri="{FF2B5EF4-FFF2-40B4-BE49-F238E27FC236}">
-                <a16:creationId xmlns:a16="http://schemas.microsoft.com/office/drawing/2014/main" id="{D18FA22D-959A-78A0-9AEE-6476C5226C0B}"/>
+                <a16:creationId xmlns:a16="http://schemas.microsoft.com/office/drawing/2014/main" id="{9073C50B-9DC5-DBC6-0B78-9F87EF0AA9E1}"/>
               </a:ext>
             </a:extLst>
           </p:cNvPr>
@@ -711,7 +711,7 @@
           <p:cNvPr id="4" name="日付プレースホルダー 3">
             <a:extLst>
               <a:ext uri="{FF2B5EF4-FFF2-40B4-BE49-F238E27FC236}">
-                <a16:creationId xmlns:a16="http://schemas.microsoft.com/office/drawing/2014/main" id="{06F8BCCC-D92C-8168-2C6A-78D438498E2A}"/>
+                <a16:creationId xmlns:a16="http://schemas.microsoft.com/office/drawing/2014/main" id="{5A2214DD-5D7F-9509-625D-DCA1E6412517}"/>
               </a:ext>
             </a:extLst>
           </p:cNvPr>
@@ -727,7 +727,7 @@
           <a:bodyPr/>
           <a:lstStyle/>
           <a:p>
-            <a:fld id="{3279F086-2EA9-4985-A6A5-A8350F321C5D}" type="datetimeFigureOut">
+            <a:fld id="{64C2380F-06C8-4385-98CA-3B5510F0C678}" type="datetimeFigureOut">
               <a:rPr kumimoji="1" lang="ja-JP" altLang="en-US" smtClean="0"/>
               <a:t>2026/7/30</a:t>
             </a:fld>
@@ -740,7 +740,7 @@
           <p:cNvPr id="5" name="フッター プレースホルダー 4">
             <a:extLst>
               <a:ext uri="{FF2B5EF4-FFF2-40B4-BE49-F238E27FC236}">
-                <a16:creationId xmlns:a16="http://schemas.microsoft.com/office/drawing/2014/main" id="{CE669262-E5D1-4C86-0191-CF80119B0421}"/>
+                <a16:creationId xmlns:a16="http://schemas.microsoft.com/office/drawing/2014/main" id="{AF47A8E6-AEB2-2B27-4271-81DA7F47CA2B}"/>
               </a:ext>
             </a:extLst>
           </p:cNvPr>
@@ -765,7 +765,7 @@
           <p:cNvPr id="6" name="スライド番号プレースホルダー 5">
             <a:extLst>
               <a:ext uri="{FF2B5EF4-FFF2-40B4-BE49-F238E27FC236}">
-                <a16:creationId xmlns:a16="http://schemas.microsoft.com/office/drawing/2014/main" id="{A9E53D32-B1FD-7F61-BCDD-E8B7B764C596}"/>
+                <a16:creationId xmlns:a16="http://schemas.microsoft.com/office/drawing/2014/main" id="{D6EE136B-3CDA-0FE5-3243-03CE27A6397D}"/>
               </a:ext>
             </a:extLst>
           </p:cNvPr>
@@ -781,7 +781,7 @@
           <a:bodyPr/>
           <a:lstStyle/>
           <a:p>
-            <a:fld id="{1DC51C15-53FB-455F-86B6-AABC030D8325}" type="slidenum">
+            <a:fld id="{8383BE86-43FA-4F89-AF80-14BC313F82EA}" type="slidenum">
               <a:rPr kumimoji="1" lang="ja-JP" altLang="en-US" smtClean="0"/>
               <a:t>‹#›</a:t>
             </a:fld>
@@ -792,7 +792,7 @@
     </p:spTree>
     <p:extLst>
       <p:ext uri="{BB962C8B-B14F-4D97-AF65-F5344CB8AC3E}">
-        <p14:creationId xmlns:p14="http://schemas.microsoft.com/office/powerpoint/2010/main" val="3068227866"/>
+        <p14:creationId xmlns:p14="http://schemas.microsoft.com/office/powerpoint/2010/main" val="43091232"/>
       </p:ext>
     </p:extLst>
   </p:cSld>
@@ -824,7 +824,7 @@
           <p:cNvPr id="2" name="タイトル 1">
             <a:extLst>
               <a:ext uri="{FF2B5EF4-FFF2-40B4-BE49-F238E27FC236}">
-                <a16:creationId xmlns:a16="http://schemas.microsoft.com/office/drawing/2014/main" id="{8C02B40C-E45E-7DFC-BADA-4013FBEE094B}"/>
+                <a16:creationId xmlns:a16="http://schemas.microsoft.com/office/drawing/2014/main" id="{CFD2BAC3-9F7D-E61F-53E4-97A8BA764B46}"/>
               </a:ext>
             </a:extLst>
           </p:cNvPr>
@@ -852,7 +852,7 @@
           <p:cNvPr id="3" name="コンテンツ プレースホルダー 2">
             <a:extLst>
               <a:ext uri="{FF2B5EF4-FFF2-40B4-BE49-F238E27FC236}">
-                <a16:creationId xmlns:a16="http://schemas.microsoft.com/office/drawing/2014/main" id="{A45ABEC6-4E7D-E3BC-A058-E0707FAE301E}"/>
+                <a16:creationId xmlns:a16="http://schemas.microsoft.com/office/drawing/2014/main" id="{BAF7CD22-E7C3-9D11-6119-C2E360A03D5F}"/>
               </a:ext>
             </a:extLst>
           </p:cNvPr>
@@ -941,7 +941,7 @@
           <p:cNvPr id="4" name="日付プレースホルダー 3">
             <a:extLst>
               <a:ext uri="{FF2B5EF4-FFF2-40B4-BE49-F238E27FC236}">
-                <a16:creationId xmlns:a16="http://schemas.microsoft.com/office/drawing/2014/main" id="{F2176EC5-E5E1-D0A2-EF02-7ED89C88062D}"/>
+                <a16:creationId xmlns:a16="http://schemas.microsoft.com/office/drawing/2014/main" id="{2D3EDA19-96BF-7F01-C354-6B331FDA3298}"/>
               </a:ext>
             </a:extLst>
           </p:cNvPr>
@@ -957,7 +957,7 @@
           <a:bodyPr/>
           <a:lstStyle/>
           <a:p>
-            <a:fld id="{3279F086-2EA9-4985-A6A5-A8350F321C5D}" type="datetimeFigureOut">
+            <a:fld id="{64C2380F-06C8-4385-98CA-3B5510F0C678}" type="datetimeFigureOut">
               <a:rPr kumimoji="1" lang="ja-JP" altLang="en-US" smtClean="0"/>
               <a:t>2026/7/30</a:t>
             </a:fld>
@@ -970,7 +970,7 @@
           <p:cNvPr id="5" name="フッター プレースホルダー 4">
             <a:extLst>
               <a:ext uri="{FF2B5EF4-FFF2-40B4-BE49-F238E27FC236}">
-                <a16:creationId xmlns:a16="http://schemas.microsoft.com/office/drawing/2014/main" id="{BC56D0F4-13F6-8BBF-0F87-24C97A878052}"/>
+                <a16:creationId xmlns:a16="http://schemas.microsoft.com/office/drawing/2014/main" id="{CCF281D5-31E3-19D2-DE53-B6823821F961}"/>
               </a:ext>
             </a:extLst>
           </p:cNvPr>
@@ -995,7 +995,7 @@
           <p:cNvPr id="6" name="スライド番号プレースホルダー 5">
             <a:extLst>
               <a:ext uri="{FF2B5EF4-FFF2-40B4-BE49-F238E27FC236}">
-                <a16:creationId xmlns:a16="http://schemas.microsoft.com/office/drawing/2014/main" id="{8BB29C46-BB11-8708-CC12-82DF586AF7F4}"/>
+                <a16:creationId xmlns:a16="http://schemas.microsoft.com/office/drawing/2014/main" id="{5040204B-B2C1-6F77-A48C-E2D9DE9A6267}"/>
               </a:ext>
             </a:extLst>
           </p:cNvPr>
@@ -1011,7 +1011,7 @@
           <a:bodyPr/>
           <a:lstStyle/>
           <a:p>
-            <a:fld id="{1DC51C15-53FB-455F-86B6-AABC030D8325}" type="slidenum">
+            <a:fld id="{8383BE86-43FA-4F89-AF80-14BC313F82EA}" type="slidenum">
               <a:rPr kumimoji="1" lang="ja-JP" altLang="en-US" smtClean="0"/>
               <a:t>‹#›</a:t>
             </a:fld>
@@ -1022,7 +1022,7 @@
     </p:spTree>
     <p:extLst>
       <p:ext uri="{BB962C8B-B14F-4D97-AF65-F5344CB8AC3E}">
-        <p14:creationId xmlns:p14="http://schemas.microsoft.com/office/powerpoint/2010/main" val="578358205"/>
+        <p14:creationId xmlns:p14="http://schemas.microsoft.com/office/powerpoint/2010/main" val="1831877247"/>
       </p:ext>
     </p:extLst>
   </p:cSld>
@@ -1054,7 +1054,7 @@
           <p:cNvPr id="2" name="タイトル 1">
             <a:extLst>
               <a:ext uri="{FF2B5EF4-FFF2-40B4-BE49-F238E27FC236}">
-                <a16:creationId xmlns:a16="http://schemas.microsoft.com/office/drawing/2014/main" id="{EF94A76B-2360-232E-BF7E-C0789D5BCACB}"/>
+                <a16:creationId xmlns:a16="http://schemas.microsoft.com/office/drawing/2014/main" id="{2D189942-C02F-4010-28E5-37CEEF04671E}"/>
               </a:ext>
             </a:extLst>
           </p:cNvPr>
@@ -1091,7 +1091,7 @@
           <p:cNvPr id="3" name="テキスト プレースホルダー 2">
             <a:extLst>
               <a:ext uri="{FF2B5EF4-FFF2-40B4-BE49-F238E27FC236}">
-                <a16:creationId xmlns:a16="http://schemas.microsoft.com/office/drawing/2014/main" id="{E696BFF8-03F9-18A4-1382-A4B2A25B2ADE}"/>
+                <a16:creationId xmlns:a16="http://schemas.microsoft.com/office/drawing/2014/main" id="{31F4C454-1F76-790E-9FAA-3D0C780873B5}"/>
               </a:ext>
             </a:extLst>
           </p:cNvPr>
@@ -1216,7 +1216,7 @@
           <p:cNvPr id="4" name="日付プレースホルダー 3">
             <a:extLst>
               <a:ext uri="{FF2B5EF4-FFF2-40B4-BE49-F238E27FC236}">
-                <a16:creationId xmlns:a16="http://schemas.microsoft.com/office/drawing/2014/main" id="{60C39D11-D200-9732-1EDC-472A8E248EAF}"/>
+                <a16:creationId xmlns:a16="http://schemas.microsoft.com/office/drawing/2014/main" id="{E113B309-6E4D-3B5E-503D-A799D094295F}"/>
               </a:ext>
             </a:extLst>
           </p:cNvPr>
@@ -1232,7 +1232,7 @@
           <a:bodyPr/>
           <a:lstStyle/>
           <a:p>
-            <a:fld id="{3279F086-2EA9-4985-A6A5-A8350F321C5D}" type="datetimeFigureOut">
+            <a:fld id="{64C2380F-06C8-4385-98CA-3B5510F0C678}" type="datetimeFigureOut">
               <a:rPr kumimoji="1" lang="ja-JP" altLang="en-US" smtClean="0"/>
               <a:t>2026/7/30</a:t>
             </a:fld>
@@ -1245,7 +1245,7 @@
           <p:cNvPr id="5" name="フッター プレースホルダー 4">
             <a:extLst>
               <a:ext uri="{FF2B5EF4-FFF2-40B4-BE49-F238E27FC236}">
-                <a16:creationId xmlns:a16="http://schemas.microsoft.com/office/drawing/2014/main" id="{E2668A13-6039-07C2-4F4F-74CA92ADF365}"/>
+                <a16:creationId xmlns:a16="http://schemas.microsoft.com/office/drawing/2014/main" id="{1F94DF0C-9627-EA3E-C8AB-DE446544C147}"/>
               </a:ext>
             </a:extLst>
           </p:cNvPr>
@@ -1270,7 +1270,7 @@
           <p:cNvPr id="6" name="スライド番号プレースホルダー 5">
             <a:extLst>
               <a:ext uri="{FF2B5EF4-FFF2-40B4-BE49-F238E27FC236}">
-                <a16:creationId xmlns:a16="http://schemas.microsoft.com/office/drawing/2014/main" id="{9B208B46-E157-1BE6-764C-7E25B386E52A}"/>
+                <a16:creationId xmlns:a16="http://schemas.microsoft.com/office/drawing/2014/main" id="{2BFE887A-023F-9F89-67C8-99488A891939}"/>
               </a:ext>
             </a:extLst>
           </p:cNvPr>
@@ -1286,7 +1286,7 @@
           <a:bodyPr/>
           <a:lstStyle/>
           <a:p>
-            <a:fld id="{1DC51C15-53FB-455F-86B6-AABC030D8325}" type="slidenum">
+            <a:fld id="{8383BE86-43FA-4F89-AF80-14BC313F82EA}" type="slidenum">
               <a:rPr kumimoji="1" lang="ja-JP" altLang="en-US" smtClean="0"/>
               <a:t>‹#›</a:t>
             </a:fld>
@@ -1297,7 +1297,7 @@
     </p:spTree>
     <p:extLst>
       <p:ext uri="{BB962C8B-B14F-4D97-AF65-F5344CB8AC3E}">
-        <p14:creationId xmlns:p14="http://schemas.microsoft.com/office/powerpoint/2010/main" val="668344821"/>
+        <p14:creationId xmlns:p14="http://schemas.microsoft.com/office/powerpoint/2010/main" val="4274752130"/>
       </p:ext>
     </p:extLst>
   </p:cSld>
@@ -1329,7 +1329,7 @@
           <p:cNvPr id="2" name="タイトル 1">
             <a:extLst>
               <a:ext uri="{FF2B5EF4-FFF2-40B4-BE49-F238E27FC236}">
-                <a16:creationId xmlns:a16="http://schemas.microsoft.com/office/drawing/2014/main" id="{D5233144-659D-98BC-1DF4-0F12CBA96295}"/>
+                <a16:creationId xmlns:a16="http://schemas.microsoft.com/office/drawing/2014/main" id="{279556CC-DDF5-4991-3694-83A22443CC01}"/>
               </a:ext>
             </a:extLst>
           </p:cNvPr>
@@ -1357,7 +1357,7 @@
           <p:cNvPr id="3" name="コンテンツ プレースホルダー 2">
             <a:extLst>
               <a:ext uri="{FF2B5EF4-FFF2-40B4-BE49-F238E27FC236}">
-                <a16:creationId xmlns:a16="http://schemas.microsoft.com/office/drawing/2014/main" id="{B512F3C7-F74E-B31E-2A15-F669785DCAF3}"/>
+                <a16:creationId xmlns:a16="http://schemas.microsoft.com/office/drawing/2014/main" id="{0E802D29-E3A4-02E6-F3CA-A447C6464EFE}"/>
               </a:ext>
             </a:extLst>
           </p:cNvPr>
@@ -1451,7 +1451,7 @@
           <p:cNvPr id="4" name="コンテンツ プレースホルダー 3">
             <a:extLst>
               <a:ext uri="{FF2B5EF4-FFF2-40B4-BE49-F238E27FC236}">
-                <a16:creationId xmlns:a16="http://schemas.microsoft.com/office/drawing/2014/main" id="{37DD08F0-6C8D-2540-7703-ABDD015F8FB9}"/>
+                <a16:creationId xmlns:a16="http://schemas.microsoft.com/office/drawing/2014/main" id="{9B3B69A2-2920-60E7-0A55-2700FD942666}"/>
               </a:ext>
             </a:extLst>
           </p:cNvPr>
@@ -1545,7 +1545,7 @@
           <p:cNvPr id="5" name="日付プレースホルダー 4">
             <a:extLst>
               <a:ext uri="{FF2B5EF4-FFF2-40B4-BE49-F238E27FC236}">
-                <a16:creationId xmlns:a16="http://schemas.microsoft.com/office/drawing/2014/main" id="{E49CD196-710F-071D-CA04-1A43F0310983}"/>
+                <a16:creationId xmlns:a16="http://schemas.microsoft.com/office/drawing/2014/main" id="{E04F7B58-B79F-3562-4C4A-171C4FCC76DA}"/>
               </a:ext>
             </a:extLst>
           </p:cNvPr>
@@ -1561,7 +1561,7 @@
           <a:bodyPr/>
           <a:lstStyle/>
           <a:p>
-            <a:fld id="{3279F086-2EA9-4985-A6A5-A8350F321C5D}" type="datetimeFigureOut">
+            <a:fld id="{64C2380F-06C8-4385-98CA-3B5510F0C678}" type="datetimeFigureOut">
               <a:rPr kumimoji="1" lang="ja-JP" altLang="en-US" smtClean="0"/>
               <a:t>2026/7/30</a:t>
             </a:fld>
@@ -1574,7 +1574,7 @@
           <p:cNvPr id="6" name="フッター プレースホルダー 5">
             <a:extLst>
               <a:ext uri="{FF2B5EF4-FFF2-40B4-BE49-F238E27FC236}">
-                <a16:creationId xmlns:a16="http://schemas.microsoft.com/office/drawing/2014/main" id="{210CC2BC-6495-0320-3897-0A31A5CC1793}"/>
+                <a16:creationId xmlns:a16="http://schemas.microsoft.com/office/drawing/2014/main" id="{3B55EDBC-EEE6-9C50-0F09-F107F7C56334}"/>
               </a:ext>
             </a:extLst>
           </p:cNvPr>
@@ -1599,7 +1599,7 @@
           <p:cNvPr id="7" name="スライド番号プレースホルダー 6">
             <a:extLst>
               <a:ext uri="{FF2B5EF4-FFF2-40B4-BE49-F238E27FC236}">
-                <a16:creationId xmlns:a16="http://schemas.microsoft.com/office/drawing/2014/main" id="{298105ED-DBAB-885A-47D0-3C9C255D2721}"/>
+                <a16:creationId xmlns:a16="http://schemas.microsoft.com/office/drawing/2014/main" id="{83FEEE45-9016-74F8-4A03-B65F2F0BA4BC}"/>
               </a:ext>
             </a:extLst>
           </p:cNvPr>
@@ -1615,7 +1615,7 @@
           <a:bodyPr/>
           <a:lstStyle/>
           <a:p>
-            <a:fld id="{1DC51C15-53FB-455F-86B6-AABC030D8325}" type="slidenum">
+            <a:fld id="{8383BE86-43FA-4F89-AF80-14BC313F82EA}" type="slidenum">
               <a:rPr kumimoji="1" lang="ja-JP" altLang="en-US" smtClean="0"/>
               <a:t>‹#›</a:t>
             </a:fld>
@@ -1626,7 +1626,7 @@
     </p:spTree>
     <p:extLst>
       <p:ext uri="{BB962C8B-B14F-4D97-AF65-F5344CB8AC3E}">
-        <p14:creationId xmlns:p14="http://schemas.microsoft.com/office/powerpoint/2010/main" val="821312291"/>
+        <p14:creationId xmlns:p14="http://schemas.microsoft.com/office/powerpoint/2010/main" val="4034609463"/>
       </p:ext>
     </p:extLst>
   </p:cSld>
@@ -1658,7 +1658,7 @@
           <p:cNvPr id="2" name="タイトル 1">
             <a:extLst>
               <a:ext uri="{FF2B5EF4-FFF2-40B4-BE49-F238E27FC236}">
-                <a16:creationId xmlns:a16="http://schemas.microsoft.com/office/drawing/2014/main" id="{BC0EE310-0699-A7BE-1EE3-D705FC0A18B7}"/>
+                <a16:creationId xmlns:a16="http://schemas.microsoft.com/office/drawing/2014/main" id="{9974F62A-B260-819D-332D-F9877BC7709B}"/>
               </a:ext>
             </a:extLst>
           </p:cNvPr>
@@ -1691,7 +1691,7 @@
           <p:cNvPr id="3" name="テキスト プレースホルダー 2">
             <a:extLst>
               <a:ext uri="{FF2B5EF4-FFF2-40B4-BE49-F238E27FC236}">
-                <a16:creationId xmlns:a16="http://schemas.microsoft.com/office/drawing/2014/main" id="{5A74D941-1722-2135-0890-2D9C2F0B9CEF}"/>
+                <a16:creationId xmlns:a16="http://schemas.microsoft.com/office/drawing/2014/main" id="{685B6765-8E1F-61C1-3EBA-058B92B70303}"/>
               </a:ext>
             </a:extLst>
           </p:cNvPr>
@@ -1762,7 +1762,7 @@
           <p:cNvPr id="4" name="コンテンツ プレースホルダー 3">
             <a:extLst>
               <a:ext uri="{FF2B5EF4-FFF2-40B4-BE49-F238E27FC236}">
-                <a16:creationId xmlns:a16="http://schemas.microsoft.com/office/drawing/2014/main" id="{0B57B2AC-2804-7609-D1E9-34F0DC4630D0}"/>
+                <a16:creationId xmlns:a16="http://schemas.microsoft.com/office/drawing/2014/main" id="{603C81B7-2B05-A874-166E-859CE2499EC7}"/>
               </a:ext>
             </a:extLst>
           </p:cNvPr>
@@ -1856,7 +1856,7 @@
           <p:cNvPr id="5" name="テキスト プレースホルダー 4">
             <a:extLst>
               <a:ext uri="{FF2B5EF4-FFF2-40B4-BE49-F238E27FC236}">
-                <a16:creationId xmlns:a16="http://schemas.microsoft.com/office/drawing/2014/main" id="{915E2BDC-27EB-77CD-31B3-F394D5819BC4}"/>
+                <a16:creationId xmlns:a16="http://schemas.microsoft.com/office/drawing/2014/main" id="{CC1ADFE6-7D11-C37C-AA03-3F366750B048}"/>
               </a:ext>
             </a:extLst>
           </p:cNvPr>
@@ -1927,7 +1927,7 @@
           <p:cNvPr id="6" name="コンテンツ プレースホルダー 5">
             <a:extLst>
               <a:ext uri="{FF2B5EF4-FFF2-40B4-BE49-F238E27FC236}">
-                <a16:creationId xmlns:a16="http://schemas.microsoft.com/office/drawing/2014/main" id="{B2D68708-4CDD-2A22-7459-97866400FA35}"/>
+                <a16:creationId xmlns:a16="http://schemas.microsoft.com/office/drawing/2014/main" id="{0CBA797B-2728-8B29-418F-1A1F3338D8E7}"/>
               </a:ext>
             </a:extLst>
           </p:cNvPr>
@@ -2021,7 +2021,7 @@
           <p:cNvPr id="7" name="日付プレースホルダー 6">
             <a:extLst>
               <a:ext uri="{FF2B5EF4-FFF2-40B4-BE49-F238E27FC236}">
-                <a16:creationId xmlns:a16="http://schemas.microsoft.com/office/drawing/2014/main" id="{266CE286-EA5A-7FAD-3CBC-C612C95CE82F}"/>
+                <a16:creationId xmlns:a16="http://schemas.microsoft.com/office/drawing/2014/main" id="{9BE21C0F-CBAB-E557-54F1-8D888AD5D0FB}"/>
               </a:ext>
             </a:extLst>
           </p:cNvPr>
@@ -2037,7 +2037,7 @@
           <a:bodyPr/>
           <a:lstStyle/>
           <a:p>
-            <a:fld id="{3279F086-2EA9-4985-A6A5-A8350F321C5D}" type="datetimeFigureOut">
+            <a:fld id="{64C2380F-06C8-4385-98CA-3B5510F0C678}" type="datetimeFigureOut">
               <a:rPr kumimoji="1" lang="ja-JP" altLang="en-US" smtClean="0"/>
               <a:t>2026/7/30</a:t>
             </a:fld>
@@ -2050,7 +2050,7 @@
           <p:cNvPr id="8" name="フッター プレースホルダー 7">
             <a:extLst>
               <a:ext uri="{FF2B5EF4-FFF2-40B4-BE49-F238E27FC236}">
-                <a16:creationId xmlns:a16="http://schemas.microsoft.com/office/drawing/2014/main" id="{BE2FFBAB-A564-AE9A-B8D9-4822BA345EB7}"/>
+                <a16:creationId xmlns:a16="http://schemas.microsoft.com/office/drawing/2014/main" id="{186B9A39-7F1D-2DAF-B1F8-F4F796B02EB9}"/>
               </a:ext>
             </a:extLst>
           </p:cNvPr>
@@ -2075,7 +2075,7 @@
           <p:cNvPr id="9" name="スライド番号プレースホルダー 8">
             <a:extLst>
               <a:ext uri="{FF2B5EF4-FFF2-40B4-BE49-F238E27FC236}">
-                <a16:creationId xmlns:a16="http://schemas.microsoft.com/office/drawing/2014/main" id="{EF1D4C47-1FCD-11F5-6D00-8B43D547F8AE}"/>
+                <a16:creationId xmlns:a16="http://schemas.microsoft.com/office/drawing/2014/main" id="{9A1825BE-4D1F-4ECB-ED8F-4FE3C20EF0AA}"/>
               </a:ext>
             </a:extLst>
           </p:cNvPr>
@@ -2091,7 +2091,7 @@
           <a:bodyPr/>
           <a:lstStyle/>
           <a:p>
-            <a:fld id="{1DC51C15-53FB-455F-86B6-AABC030D8325}" type="slidenum">
+            <a:fld id="{8383BE86-43FA-4F89-AF80-14BC313F82EA}" type="slidenum">
               <a:rPr kumimoji="1" lang="ja-JP" altLang="en-US" smtClean="0"/>
               <a:t>‹#›</a:t>
             </a:fld>
@@ -2102,7 +2102,7 @@
     </p:spTree>
     <p:extLst>
       <p:ext uri="{BB962C8B-B14F-4D97-AF65-F5344CB8AC3E}">
-        <p14:creationId xmlns:p14="http://schemas.microsoft.com/office/powerpoint/2010/main" val="3489451227"/>
+        <p14:creationId xmlns:p14="http://schemas.microsoft.com/office/powerpoint/2010/main" val="1588766558"/>
       </p:ext>
     </p:extLst>
   </p:cSld>
@@ -2134,7 +2134,7 @@
           <p:cNvPr id="2" name="タイトル 1">
             <a:extLst>
               <a:ext uri="{FF2B5EF4-FFF2-40B4-BE49-F238E27FC236}">
-                <a16:creationId xmlns:a16="http://schemas.microsoft.com/office/drawing/2014/main" id="{22FA1A97-8373-CD83-D939-7DCBB3C96627}"/>
+                <a16:creationId xmlns:a16="http://schemas.microsoft.com/office/drawing/2014/main" id="{AFFB1DCE-26C0-B67A-B11E-3DEA0F6FF702}"/>
               </a:ext>
             </a:extLst>
           </p:cNvPr>
@@ -2162,7 +2162,7 @@
           <p:cNvPr id="3" name="日付プレースホルダー 2">
             <a:extLst>
               <a:ext uri="{FF2B5EF4-FFF2-40B4-BE49-F238E27FC236}">
-                <a16:creationId xmlns:a16="http://schemas.microsoft.com/office/drawing/2014/main" id="{6F045375-7DA5-1B23-434B-AD7E8DECA154}"/>
+                <a16:creationId xmlns:a16="http://schemas.microsoft.com/office/drawing/2014/main" id="{5AFAC5E5-5C14-C4C4-95F8-70F33BA6A0E5}"/>
               </a:ext>
             </a:extLst>
           </p:cNvPr>
@@ -2178,7 +2178,7 @@
           <a:bodyPr/>
           <a:lstStyle/>
           <a:p>
-            <a:fld id="{3279F086-2EA9-4985-A6A5-A8350F321C5D}" type="datetimeFigureOut">
+            <a:fld id="{64C2380F-06C8-4385-98CA-3B5510F0C678}" type="datetimeFigureOut">
               <a:rPr kumimoji="1" lang="ja-JP" altLang="en-US" smtClean="0"/>
               <a:t>2026/7/30</a:t>
             </a:fld>
@@ -2191,7 +2191,7 @@
           <p:cNvPr id="4" name="フッター プレースホルダー 3">
             <a:extLst>
               <a:ext uri="{FF2B5EF4-FFF2-40B4-BE49-F238E27FC236}">
-                <a16:creationId xmlns:a16="http://schemas.microsoft.com/office/drawing/2014/main" id="{560CA3D5-B644-67A8-1F5D-48DB730BA91B}"/>
+                <a16:creationId xmlns:a16="http://schemas.microsoft.com/office/drawing/2014/main" id="{26AA1F47-9C9A-6B10-EC84-6E644FFCC391}"/>
               </a:ext>
             </a:extLst>
           </p:cNvPr>
@@ -2216,7 +2216,7 @@
           <p:cNvPr id="5" name="スライド番号プレースホルダー 4">
             <a:extLst>
               <a:ext uri="{FF2B5EF4-FFF2-40B4-BE49-F238E27FC236}">
-                <a16:creationId xmlns:a16="http://schemas.microsoft.com/office/drawing/2014/main" id="{0D18514C-50DE-65F2-8E24-2704B0C6E888}"/>
+                <a16:creationId xmlns:a16="http://schemas.microsoft.com/office/drawing/2014/main" id="{19090EF7-641B-0496-0362-BA78E5A68F64}"/>
               </a:ext>
             </a:extLst>
           </p:cNvPr>
@@ -2232,7 +2232,7 @@
           <a:bodyPr/>
           <a:lstStyle/>
           <a:p>
-            <a:fld id="{1DC51C15-53FB-455F-86B6-AABC030D8325}" type="slidenum">
+            <a:fld id="{8383BE86-43FA-4F89-AF80-14BC313F82EA}" type="slidenum">
               <a:rPr kumimoji="1" lang="ja-JP" altLang="en-US" smtClean="0"/>
               <a:t>‹#›</a:t>
             </a:fld>
@@ -2243,7 +2243,7 @@
     </p:spTree>
     <p:extLst>
       <p:ext uri="{BB962C8B-B14F-4D97-AF65-F5344CB8AC3E}">
-        <p14:creationId xmlns:p14="http://schemas.microsoft.com/office/powerpoint/2010/main" val="3227550694"/>
+        <p14:creationId xmlns:p14="http://schemas.microsoft.com/office/powerpoint/2010/main" val="2515290775"/>
       </p:ext>
     </p:extLst>
   </p:cSld>
@@ -2275,7 +2275,7 @@
           <p:cNvPr id="2" name="日付プレースホルダー 1">
             <a:extLst>
               <a:ext uri="{FF2B5EF4-FFF2-40B4-BE49-F238E27FC236}">
-                <a16:creationId xmlns:a16="http://schemas.microsoft.com/office/drawing/2014/main" id="{564FD2A9-63D4-8251-1A78-4AB4765AD745}"/>
+                <a16:creationId xmlns:a16="http://schemas.microsoft.com/office/drawing/2014/main" id="{D2EFF908-6FAA-3D36-4258-A364A6B0C9AA}"/>
               </a:ext>
             </a:extLst>
           </p:cNvPr>
@@ -2291,7 +2291,7 @@
           <a:bodyPr/>
           <a:lstStyle/>
           <a:p>
-            <a:fld id="{3279F086-2EA9-4985-A6A5-A8350F321C5D}" type="datetimeFigureOut">
+            <a:fld id="{64C2380F-06C8-4385-98CA-3B5510F0C678}" type="datetimeFigureOut">
               <a:rPr kumimoji="1" lang="ja-JP" altLang="en-US" smtClean="0"/>
               <a:t>2026/7/30</a:t>
             </a:fld>
@@ -2304,7 +2304,7 @@
           <p:cNvPr id="3" name="フッター プレースホルダー 2">
             <a:extLst>
               <a:ext uri="{FF2B5EF4-FFF2-40B4-BE49-F238E27FC236}">
-                <a16:creationId xmlns:a16="http://schemas.microsoft.com/office/drawing/2014/main" id="{340C19F5-E528-C72C-4C05-0FB462BA3B59}"/>
+                <a16:creationId xmlns:a16="http://schemas.microsoft.com/office/drawing/2014/main" id="{6CA44116-EFB1-F7DE-1161-21BBB851EE66}"/>
               </a:ext>
             </a:extLst>
           </p:cNvPr>
@@ -2329,7 +2329,7 @@
           <p:cNvPr id="4" name="スライド番号プレースホルダー 3">
             <a:extLst>
               <a:ext uri="{FF2B5EF4-FFF2-40B4-BE49-F238E27FC236}">
-                <a16:creationId xmlns:a16="http://schemas.microsoft.com/office/drawing/2014/main" id="{E6491735-C986-D33C-80ED-8787DA167AB2}"/>
+                <a16:creationId xmlns:a16="http://schemas.microsoft.com/office/drawing/2014/main" id="{F221CB0B-7CAB-1FAA-4E1B-49D1B2276C55}"/>
               </a:ext>
             </a:extLst>
           </p:cNvPr>
@@ -2345,7 +2345,7 @@
           <a:bodyPr/>
           <a:lstStyle/>
           <a:p>
-            <a:fld id="{1DC51C15-53FB-455F-86B6-AABC030D8325}" type="slidenum">
+            <a:fld id="{8383BE86-43FA-4F89-AF80-14BC313F82EA}" type="slidenum">
               <a:rPr kumimoji="1" lang="ja-JP" altLang="en-US" smtClean="0"/>
               <a:t>‹#›</a:t>
             </a:fld>
@@ -2356,7 +2356,7 @@
     </p:spTree>
     <p:extLst>
       <p:ext uri="{BB962C8B-B14F-4D97-AF65-F5344CB8AC3E}">
-        <p14:creationId xmlns:p14="http://schemas.microsoft.com/office/powerpoint/2010/main" val="35514062"/>
+        <p14:creationId xmlns:p14="http://schemas.microsoft.com/office/powerpoint/2010/main" val="1426734207"/>
       </p:ext>
     </p:extLst>
   </p:cSld>
@@ -2388,7 +2388,7 @@
           <p:cNvPr id="2" name="タイトル 1">
             <a:extLst>
               <a:ext uri="{FF2B5EF4-FFF2-40B4-BE49-F238E27FC236}">
-                <a16:creationId xmlns:a16="http://schemas.microsoft.com/office/drawing/2014/main" id="{79B3911C-1CC6-2252-B837-6E65E0FA8EBC}"/>
+                <a16:creationId xmlns:a16="http://schemas.microsoft.com/office/drawing/2014/main" id="{D789C714-A36E-B265-0DC0-0CD8BCEB283D}"/>
               </a:ext>
             </a:extLst>
           </p:cNvPr>
@@ -2425,7 +2425,7 @@
           <p:cNvPr id="3" name="コンテンツ プレースホルダー 2">
             <a:extLst>
               <a:ext uri="{FF2B5EF4-FFF2-40B4-BE49-F238E27FC236}">
-                <a16:creationId xmlns:a16="http://schemas.microsoft.com/office/drawing/2014/main" id="{FE14E2D5-6A62-A329-4A91-E824E7C1ECCE}"/>
+                <a16:creationId xmlns:a16="http://schemas.microsoft.com/office/drawing/2014/main" id="{8C54B66A-C77E-0FE3-DE45-B41B940A27F4}"/>
               </a:ext>
             </a:extLst>
           </p:cNvPr>
@@ -2547,7 +2547,7 @@
           <p:cNvPr id="4" name="テキスト プレースホルダー 3">
             <a:extLst>
               <a:ext uri="{FF2B5EF4-FFF2-40B4-BE49-F238E27FC236}">
-                <a16:creationId xmlns:a16="http://schemas.microsoft.com/office/drawing/2014/main" id="{EB6FBC74-12BB-4204-3BE7-390B66FA04BF}"/>
+                <a16:creationId xmlns:a16="http://schemas.microsoft.com/office/drawing/2014/main" id="{C0D8988F-2C34-ABBF-B476-E7CE01CAAB0E}"/>
               </a:ext>
             </a:extLst>
           </p:cNvPr>
@@ -2618,7 +2618,7 @@
           <p:cNvPr id="5" name="日付プレースホルダー 4">
             <a:extLst>
               <a:ext uri="{FF2B5EF4-FFF2-40B4-BE49-F238E27FC236}">
-                <a16:creationId xmlns:a16="http://schemas.microsoft.com/office/drawing/2014/main" id="{DE78F4E9-8B95-F02C-EE3B-B0F2701C49D7}"/>
+                <a16:creationId xmlns:a16="http://schemas.microsoft.com/office/drawing/2014/main" id="{8908344D-ACF6-7369-BF92-10C7D2FC2696}"/>
               </a:ext>
             </a:extLst>
           </p:cNvPr>
@@ -2634,7 +2634,7 @@
           <a:bodyPr/>
           <a:lstStyle/>
           <a:p>
-            <a:fld id="{3279F086-2EA9-4985-A6A5-A8350F321C5D}" type="datetimeFigureOut">
+            <a:fld id="{64C2380F-06C8-4385-98CA-3B5510F0C678}" type="datetimeFigureOut">
               <a:rPr kumimoji="1" lang="ja-JP" altLang="en-US" smtClean="0"/>
               <a:t>2026/7/30</a:t>
             </a:fld>
@@ -2647,7 +2647,7 @@
           <p:cNvPr id="6" name="フッター プレースホルダー 5">
             <a:extLst>
               <a:ext uri="{FF2B5EF4-FFF2-40B4-BE49-F238E27FC236}">
-                <a16:creationId xmlns:a16="http://schemas.microsoft.com/office/drawing/2014/main" id="{EDDA2FCD-7C08-2D14-6979-C17575686930}"/>
+                <a16:creationId xmlns:a16="http://schemas.microsoft.com/office/drawing/2014/main" id="{7F6B159D-2BBA-E9DB-E507-123528C5E2A0}"/>
               </a:ext>
             </a:extLst>
           </p:cNvPr>
@@ -2672,7 +2672,7 @@
           <p:cNvPr id="7" name="スライド番号プレースホルダー 6">
             <a:extLst>
               <a:ext uri="{FF2B5EF4-FFF2-40B4-BE49-F238E27FC236}">
-                <a16:creationId xmlns:a16="http://schemas.microsoft.com/office/drawing/2014/main" id="{239FD94A-B1EF-FAC0-34A5-A02964848D07}"/>
+                <a16:creationId xmlns:a16="http://schemas.microsoft.com/office/drawing/2014/main" id="{B5AEE508-BA1F-2F6E-2F85-C088026058CF}"/>
               </a:ext>
             </a:extLst>
           </p:cNvPr>
@@ -2688,7 +2688,7 @@
           <a:bodyPr/>
           <a:lstStyle/>
           <a:p>
-            <a:fld id="{1DC51C15-53FB-455F-86B6-AABC030D8325}" type="slidenum">
+            <a:fld id="{8383BE86-43FA-4F89-AF80-14BC313F82EA}" type="slidenum">
               <a:rPr kumimoji="1" lang="ja-JP" altLang="en-US" smtClean="0"/>
               <a:t>‹#›</a:t>
             </a:fld>
@@ -2699,7 +2699,7 @@
     </p:spTree>
     <p:extLst>
       <p:ext uri="{BB962C8B-B14F-4D97-AF65-F5344CB8AC3E}">
-        <p14:creationId xmlns:p14="http://schemas.microsoft.com/office/powerpoint/2010/main" val="3885652986"/>
+        <p14:creationId xmlns:p14="http://schemas.microsoft.com/office/powerpoint/2010/main" val="889847187"/>
       </p:ext>
     </p:extLst>
   </p:cSld>
@@ -2731,7 +2731,7 @@
           <p:cNvPr id="2" name="タイトル 1">
             <a:extLst>
               <a:ext uri="{FF2B5EF4-FFF2-40B4-BE49-F238E27FC236}">
-                <a16:creationId xmlns:a16="http://schemas.microsoft.com/office/drawing/2014/main" id="{1338797D-0B49-28D8-4A1A-9732FA1B79BB}"/>
+                <a16:creationId xmlns:a16="http://schemas.microsoft.com/office/drawing/2014/main" id="{AAFFDE6B-29BE-6ECD-4B68-D33DD753FC50}"/>
               </a:ext>
             </a:extLst>
           </p:cNvPr>
@@ -2768,7 +2768,7 @@
           <p:cNvPr id="3" name="図プレースホルダー 2">
             <a:extLst>
               <a:ext uri="{FF2B5EF4-FFF2-40B4-BE49-F238E27FC236}">
-                <a16:creationId xmlns:a16="http://schemas.microsoft.com/office/drawing/2014/main" id="{826FA1D6-4F9D-0956-FF94-5A33EF3EB3FA}"/>
+                <a16:creationId xmlns:a16="http://schemas.microsoft.com/office/drawing/2014/main" id="{16676710-699B-291B-2C3E-E16E7D73E501}"/>
               </a:ext>
             </a:extLst>
           </p:cNvPr>
@@ -2835,7 +2835,7 @@
           <p:cNvPr id="4" name="テキスト プレースホルダー 3">
             <a:extLst>
               <a:ext uri="{FF2B5EF4-FFF2-40B4-BE49-F238E27FC236}">
-                <a16:creationId xmlns:a16="http://schemas.microsoft.com/office/drawing/2014/main" id="{32AE1C39-4D15-BA20-D385-73419CDAAC81}"/>
+                <a16:creationId xmlns:a16="http://schemas.microsoft.com/office/drawing/2014/main" id="{093BA177-7AA5-367E-865D-6B5AE2D3C131}"/>
               </a:ext>
             </a:extLst>
           </p:cNvPr>
@@ -2906,7 +2906,7 @@
           <p:cNvPr id="5" name="日付プレースホルダー 4">
             <a:extLst>
               <a:ext uri="{FF2B5EF4-FFF2-40B4-BE49-F238E27FC236}">
-                <a16:creationId xmlns:a16="http://schemas.microsoft.com/office/drawing/2014/main" id="{A786F0C3-5D06-D2BC-FF72-B9EAEB06562E}"/>
+                <a16:creationId xmlns:a16="http://schemas.microsoft.com/office/drawing/2014/main" id="{1F83D52E-22E8-BCFB-FF64-C3BF126503C3}"/>
               </a:ext>
             </a:extLst>
           </p:cNvPr>
@@ -2922,7 +2922,7 @@
           <a:bodyPr/>
           <a:lstStyle/>
           <a:p>
-            <a:fld id="{3279F086-2EA9-4985-A6A5-A8350F321C5D}" type="datetimeFigureOut">
+            <a:fld id="{64C2380F-06C8-4385-98CA-3B5510F0C678}" type="datetimeFigureOut">
               <a:rPr kumimoji="1" lang="ja-JP" altLang="en-US" smtClean="0"/>
               <a:t>2026/7/30</a:t>
             </a:fld>
@@ -2935,7 +2935,7 @@
           <p:cNvPr id="6" name="フッター プレースホルダー 5">
             <a:extLst>
               <a:ext uri="{FF2B5EF4-FFF2-40B4-BE49-F238E27FC236}">
-                <a16:creationId xmlns:a16="http://schemas.microsoft.com/office/drawing/2014/main" id="{F323A330-8331-A688-7E99-4C7FEBC3B559}"/>
+                <a16:creationId xmlns:a16="http://schemas.microsoft.com/office/drawing/2014/main" id="{2ECCB127-3A93-C002-FE54-7BB949E3025D}"/>
               </a:ext>
             </a:extLst>
           </p:cNvPr>
@@ -2960,7 +2960,7 @@
           <p:cNvPr id="7" name="スライド番号プレースホルダー 6">
             <a:extLst>
               <a:ext uri="{FF2B5EF4-FFF2-40B4-BE49-F238E27FC236}">
-                <a16:creationId xmlns:a16="http://schemas.microsoft.com/office/drawing/2014/main" id="{D07D31C6-F7B6-0144-AFFB-4F9A5D12204F}"/>
+                <a16:creationId xmlns:a16="http://schemas.microsoft.com/office/drawing/2014/main" id="{C2FA0FF6-49AB-5D9F-EC60-707D01F576B4}"/>
               </a:ext>
             </a:extLst>
           </p:cNvPr>
@@ -2976,7 +2976,7 @@
           <a:bodyPr/>
           <a:lstStyle/>
           <a:p>
-            <a:fld id="{1DC51C15-53FB-455F-86B6-AABC030D8325}" type="slidenum">
+            <a:fld id="{8383BE86-43FA-4F89-AF80-14BC313F82EA}" type="slidenum">
               <a:rPr kumimoji="1" lang="ja-JP" altLang="en-US" smtClean="0"/>
               <a:t>‹#›</a:t>
             </a:fld>
@@ -2987,7 +2987,7 @@
     </p:spTree>
     <p:extLst>
       <p:ext uri="{BB962C8B-B14F-4D97-AF65-F5344CB8AC3E}">
-        <p14:creationId xmlns:p14="http://schemas.microsoft.com/office/powerpoint/2010/main" val="3634558030"/>
+        <p14:creationId xmlns:p14="http://schemas.microsoft.com/office/powerpoint/2010/main" val="645214679"/>
       </p:ext>
     </p:extLst>
   </p:cSld>
@@ -3024,7 +3024,7 @@
           <p:cNvPr id="2" name="タイトル プレースホルダー 1">
             <a:extLst>
               <a:ext uri="{FF2B5EF4-FFF2-40B4-BE49-F238E27FC236}">
-                <a16:creationId xmlns:a16="http://schemas.microsoft.com/office/drawing/2014/main" id="{53DCB4F6-89C8-11FE-3709-9A980130D3D7}"/>
+                <a16:creationId xmlns:a16="http://schemas.microsoft.com/office/drawing/2014/main" id="{F2927B34-A33A-3187-4626-B56480A64026}"/>
               </a:ext>
             </a:extLst>
           </p:cNvPr>
@@ -3062,7 +3062,7 @@
           <p:cNvPr id="3" name="テキスト プレースホルダー 2">
             <a:extLst>
               <a:ext uri="{FF2B5EF4-FFF2-40B4-BE49-F238E27FC236}">
-                <a16:creationId xmlns:a16="http://schemas.microsoft.com/office/drawing/2014/main" id="{D54616DF-98AD-8CC1-A635-77B64097E661}"/>
+                <a16:creationId xmlns:a16="http://schemas.microsoft.com/office/drawing/2014/main" id="{1B9F2FC3-0977-7FA5-56BF-CDF8388667B8}"/>
               </a:ext>
             </a:extLst>
           </p:cNvPr>
@@ -3161,7 +3161,7 @@
           <p:cNvPr id="4" name="日付プレースホルダー 3">
             <a:extLst>
               <a:ext uri="{FF2B5EF4-FFF2-40B4-BE49-F238E27FC236}">
-                <a16:creationId xmlns:a16="http://schemas.microsoft.com/office/drawing/2014/main" id="{F4BA5E13-A531-0EC0-91F5-85AA20B93EAB}"/>
+                <a16:creationId xmlns:a16="http://schemas.microsoft.com/office/drawing/2014/main" id="{B759DF50-FC5E-A02E-0D95-BD1D2553CAB5}"/>
               </a:ext>
             </a:extLst>
           </p:cNvPr>
@@ -3195,7 +3195,7 @@
             </a:lvl1pPr>
           </a:lstStyle>
           <a:p>
-            <a:fld id="{3279F086-2EA9-4985-A6A5-A8350F321C5D}" type="datetimeFigureOut">
+            <a:fld id="{64C2380F-06C8-4385-98CA-3B5510F0C678}" type="datetimeFigureOut">
               <a:rPr kumimoji="1" lang="ja-JP" altLang="en-US" smtClean="0"/>
               <a:t>2026/7/30</a:t>
             </a:fld>
@@ -3208,7 +3208,7 @@
           <p:cNvPr id="5" name="フッター プレースホルダー 4">
             <a:extLst>
               <a:ext uri="{FF2B5EF4-FFF2-40B4-BE49-F238E27FC236}">
-                <a16:creationId xmlns:a16="http://schemas.microsoft.com/office/drawing/2014/main" id="{97F8CDA4-C791-3096-7163-E7E0A2269BE6}"/>
+                <a16:creationId xmlns:a16="http://schemas.microsoft.com/office/drawing/2014/main" id="{4F0FC660-E98B-F499-EFB3-1424A59AF903}"/>
               </a:ext>
             </a:extLst>
           </p:cNvPr>
@@ -3251,7 +3251,7 @@
           <p:cNvPr id="6" name="スライド番号プレースホルダー 5">
             <a:extLst>
               <a:ext uri="{FF2B5EF4-FFF2-40B4-BE49-F238E27FC236}">
-                <a16:creationId xmlns:a16="http://schemas.microsoft.com/office/drawing/2014/main" id="{9A01186C-E0DF-AB25-AE2C-ED462CAC1806}"/>
+                <a16:creationId xmlns:a16="http://schemas.microsoft.com/office/drawing/2014/main" id="{EE4D685E-C235-E2B0-0E72-1F079F39F44A}"/>
               </a:ext>
             </a:extLst>
           </p:cNvPr>
@@ -3285,7 +3285,7 @@
             </a:lvl1pPr>
           </a:lstStyle>
           <a:p>
-            <a:fld id="{1DC51C15-53FB-455F-86B6-AABC030D8325}" type="slidenum">
+            <a:fld id="{8383BE86-43FA-4F89-AF80-14BC313F82EA}" type="slidenum">
               <a:rPr kumimoji="1" lang="ja-JP" altLang="en-US" smtClean="0"/>
               <a:t>‹#›</a:t>
             </a:fld>
@@ -3296,7 +3296,7 @@
     </p:spTree>
     <p:extLst>
       <p:ext uri="{BB962C8B-B14F-4D97-AF65-F5344CB8AC3E}">
-        <p14:creationId xmlns:p14="http://schemas.microsoft.com/office/powerpoint/2010/main" val="873979394"/>
+        <p14:creationId xmlns:p14="http://schemas.microsoft.com/office/powerpoint/2010/main" val="1182928235"/>
       </p:ext>
     </p:extLst>
   </p:cSld>
@@ -3619,7 +3619,7 @@
           <p:cNvPr id="2" name="テキスト ボックス 1">
             <a:extLst>
               <a:ext uri="{FF2B5EF4-FFF2-40B4-BE49-F238E27FC236}">
-                <a16:creationId xmlns:a16="http://schemas.microsoft.com/office/drawing/2014/main" id="{55D783AB-9AD0-DF01-C12A-B9922D4998BB}"/>
+                <a16:creationId xmlns:a16="http://schemas.microsoft.com/office/drawing/2014/main" id="{CD0F77EE-BFA1-065B-6DBD-E84FC2292442}"/>
               </a:ext>
             </a:extLst>
           </p:cNvPr>
@@ -3665,7 +3665,7 @@
           <p:cNvPr id="3" name="テキスト ボックス 2">
             <a:extLst>
               <a:ext uri="{FF2B5EF4-FFF2-40B4-BE49-F238E27FC236}">
-                <a16:creationId xmlns:a16="http://schemas.microsoft.com/office/drawing/2014/main" id="{32817BE1-7180-6F60-73E3-A90432AF3AAC}"/>
+                <a16:creationId xmlns:a16="http://schemas.microsoft.com/office/drawing/2014/main" id="{6CFAC7E1-B848-C768-0544-9A141BCFC2FC}"/>
               </a:ext>
             </a:extLst>
           </p:cNvPr>
@@ -3714,7 +3714,7 @@
           <p:cNvPr id="4" name="テキスト ボックス 3">
             <a:extLst>
               <a:ext uri="{FF2B5EF4-FFF2-40B4-BE49-F238E27FC236}">
-                <a16:creationId xmlns:a16="http://schemas.microsoft.com/office/drawing/2014/main" id="{97FF324A-C933-22A1-556A-E225A69B12DB}"/>
+                <a16:creationId xmlns:a16="http://schemas.microsoft.com/office/drawing/2014/main" id="{170357DC-EEA1-80F8-A18D-5BB5E36BDD3A}"/>
               </a:ext>
             </a:extLst>
           </p:cNvPr>
@@ -3754,7 +3754,7 @@
           <p:cNvPr id="5" name="テキスト ボックス 4">
             <a:extLst>
               <a:ext uri="{FF2B5EF4-FFF2-40B4-BE49-F238E27FC236}">
-                <a16:creationId xmlns:a16="http://schemas.microsoft.com/office/drawing/2014/main" id="{FE6AA78B-7743-852C-FDF2-12C57C59D2B4}"/>
+                <a16:creationId xmlns:a16="http://schemas.microsoft.com/office/drawing/2014/main" id="{AF974461-AE02-C6F1-044D-080AF76ECDBA}"/>
               </a:ext>
             </a:extLst>
           </p:cNvPr>
@@ -3801,7 +3801,7 @@
             <a:hlinkClick r:id="" action="ppaction://media"/>
             <a:extLst>
               <a:ext uri="{FF2B5EF4-FFF2-40B4-BE49-F238E27FC236}">
-                <a16:creationId xmlns:a16="http://schemas.microsoft.com/office/drawing/2014/main" id="{C65DE446-88CD-8480-F2C6-B2209E187A59}"/>
+                <a16:creationId xmlns:a16="http://schemas.microsoft.com/office/drawing/2014/main" id="{295EA242-C2C6-2C01-7D42-EE0B956EAEA3}"/>
               </a:ext>
             </a:extLst>
           </p:cNvPr>
@@ -3836,7 +3836,7 @@
     </p:spTree>
     <p:extLst>
       <p:ext uri="{BB962C8B-B14F-4D97-AF65-F5344CB8AC3E}">
-        <p14:creationId xmlns:p14="http://schemas.microsoft.com/office/powerpoint/2010/main" val="1330219808"/>
+        <p14:creationId xmlns:p14="http://schemas.microsoft.com/office/powerpoint/2010/main" val="217481357"/>
       </p:ext>
     </p:extLst>
   </p:cSld>
@@ -3960,7 +3960,7 @@
           <p:cNvPr id="2" name="テキスト ボックス 1">
             <a:extLst>
               <a:ext uri="{FF2B5EF4-FFF2-40B4-BE49-F238E27FC236}">
-                <a16:creationId xmlns:a16="http://schemas.microsoft.com/office/drawing/2014/main" id="{28297A39-068D-CA94-E794-95F42632B575}"/>
+                <a16:creationId xmlns:a16="http://schemas.microsoft.com/office/drawing/2014/main" id="{C399F909-7BDC-F3E6-B935-EC3BD7F02B0B}"/>
               </a:ext>
             </a:extLst>
           </p:cNvPr>
@@ -4006,7 +4006,7 @@
           <p:cNvPr id="3" name="テキスト ボックス 2">
             <a:extLst>
               <a:ext uri="{FF2B5EF4-FFF2-40B4-BE49-F238E27FC236}">
-                <a16:creationId xmlns:a16="http://schemas.microsoft.com/office/drawing/2014/main" id="{68C9FFE8-D4A9-F359-C92F-68D54B0E3816}"/>
+                <a16:creationId xmlns:a16="http://schemas.microsoft.com/office/drawing/2014/main" id="{11399D7D-D477-2635-F56F-F43C9F1BB6C7}"/>
               </a:ext>
             </a:extLst>
           </p:cNvPr>
@@ -4046,7 +4046,7 @@
           <p:cNvPr id="4" name="テキスト ボックス 3">
             <a:extLst>
               <a:ext uri="{FF2B5EF4-FFF2-40B4-BE49-F238E27FC236}">
-                <a16:creationId xmlns:a16="http://schemas.microsoft.com/office/drawing/2014/main" id="{F712C2CA-18AB-0AD3-7F14-8E67F13A74A4}"/>
+                <a16:creationId xmlns:a16="http://schemas.microsoft.com/office/drawing/2014/main" id="{61A278B3-E082-AE05-F24A-C1D53D29195B}"/>
               </a:ext>
             </a:extLst>
           </p:cNvPr>
@@ -4076,14 +4076,17 @@
                 </a:solidFill>
                 <a:latin typeface="Arial" panose="020B0604020202020204" pitchFamily="34" charset="0"/>
               </a:rPr>
-              <a:t>About Laravel Laravel is a web application framework with expressive, elegant syntax</a:t>
-            </a:r>
-            <a:endParaRPr kumimoji="1" lang="ja-JP" altLang="en-US" sz="2000">
-              <a:solidFill>
-                <a:srgbClr val="333333"/>
-              </a:solidFill>
-              <a:latin typeface="Arial" panose="020B0604020202020204" pitchFamily="34" charset="0"/>
-            </a:endParaRPr>
+              <a:t>Gesenmap</a:t>
+            </a:r>
+            <a:r>
+              <a:rPr kumimoji="1" lang="ja-JP" altLang="en-US" sz="2000">
+                <a:solidFill>
+                  <a:srgbClr val="333333"/>
+                </a:solidFill>
+                <a:latin typeface="Arial" panose="020B0604020202020204" pitchFamily="34" charset="0"/>
+              </a:rPr>
+              <a:t>の目的、構成、実装を公開コードから確認できるプロジェクトです。</a:t>
+            </a:r>
           </a:p>
         </p:txBody>
       </p:sp>
@@ -4092,7 +4095,7 @@
           <p:cNvPr id="5" name="テキスト ボックス 4">
             <a:extLst>
               <a:ext uri="{FF2B5EF4-FFF2-40B4-BE49-F238E27FC236}">
-                <a16:creationId xmlns:a16="http://schemas.microsoft.com/office/drawing/2014/main" id="{718BC3E5-6D63-FF0E-1A42-688FE7F9DFFB}"/>
+                <a16:creationId xmlns:a16="http://schemas.microsoft.com/office/drawing/2014/main" id="{C15BC2F0-5CD6-AA05-2276-FFE8AEA6C6DF}"/>
               </a:ext>
             </a:extLst>
           </p:cNvPr>
@@ -4139,7 +4142,7 @@
             <a:hlinkClick r:id="" action="ppaction://media"/>
             <a:extLst>
               <a:ext uri="{FF2B5EF4-FFF2-40B4-BE49-F238E27FC236}">
-                <a16:creationId xmlns:a16="http://schemas.microsoft.com/office/drawing/2014/main" id="{0281E8F0-716D-EA4C-053D-07D61BC9991F}"/>
+                <a16:creationId xmlns:a16="http://schemas.microsoft.com/office/drawing/2014/main" id="{CC05C6F6-19D6-9D5D-6D6C-78DCAD9B6CE3}"/>
               </a:ext>
             </a:extLst>
           </p:cNvPr>
@@ -4174,7 +4177,7 @@
     </p:spTree>
     <p:extLst>
       <p:ext uri="{BB962C8B-B14F-4D97-AF65-F5344CB8AC3E}">
-        <p14:creationId xmlns:p14="http://schemas.microsoft.com/office/powerpoint/2010/main" val="2872841612"/>
+        <p14:creationId xmlns:p14="http://schemas.microsoft.com/office/powerpoint/2010/main" val="1310152746"/>
       </p:ext>
     </p:extLst>
   </p:cSld>
@@ -4217,7 +4220,7 @@
                                   <p:childTnLst>
                                     <p:cmd type="call" cmd="playFrom(0.0)">
                                       <p:cBhvr>
-                                        <p:cTn id="6" dur="7780" fill="hold"/>
+                                        <p:cTn id="6" dur="7026" fill="hold"/>
                                         <p:tgtEl>
                                           <p:spTgt spid="6"/>
                                         </p:tgtEl>
@@ -4298,7 +4301,7 @@
           <p:cNvPr id="2" name="テキスト ボックス 1">
             <a:extLst>
               <a:ext uri="{FF2B5EF4-FFF2-40B4-BE49-F238E27FC236}">
-                <a16:creationId xmlns:a16="http://schemas.microsoft.com/office/drawing/2014/main" id="{C4435764-2868-815A-091F-5F5BC1D5B17F}"/>
+                <a16:creationId xmlns:a16="http://schemas.microsoft.com/office/drawing/2014/main" id="{8185CC0D-3632-ACD0-69A8-FA53C6A3D32D}"/>
               </a:ext>
             </a:extLst>
           </p:cNvPr>
@@ -4344,7 +4347,7 @@
           <p:cNvPr id="3" name="テキスト ボックス 2">
             <a:extLst>
               <a:ext uri="{FF2B5EF4-FFF2-40B4-BE49-F238E27FC236}">
-                <a16:creationId xmlns:a16="http://schemas.microsoft.com/office/drawing/2014/main" id="{B90E6514-F9FC-48AD-88DA-0B502FFBD2F7}"/>
+                <a16:creationId xmlns:a16="http://schemas.microsoft.com/office/drawing/2014/main" id="{E768EF55-F223-28B9-6C07-8B70002FD98C}"/>
               </a:ext>
             </a:extLst>
           </p:cNvPr>
@@ -4384,7 +4387,7 @@
           <p:cNvPr id="4" name="テキスト ボックス 3">
             <a:extLst>
               <a:ext uri="{FF2B5EF4-FFF2-40B4-BE49-F238E27FC236}">
-                <a16:creationId xmlns:a16="http://schemas.microsoft.com/office/drawing/2014/main" id="{A5908754-7B5D-E848-B455-C3A14EBF1CD5}"/>
+                <a16:creationId xmlns:a16="http://schemas.microsoft.com/office/drawing/2014/main" id="{EA73FEFC-B1E2-A19B-EB74-45C0F669320C}"/>
               </a:ext>
             </a:extLst>
           </p:cNvPr>
@@ -4497,7 +4500,7 @@
           <p:cNvPr id="5" name="テキスト ボックス 4">
             <a:extLst>
               <a:ext uri="{FF2B5EF4-FFF2-40B4-BE49-F238E27FC236}">
-                <a16:creationId xmlns:a16="http://schemas.microsoft.com/office/drawing/2014/main" id="{03C6EF6C-7456-4D30-73BB-0DA654E99CC2}"/>
+                <a16:creationId xmlns:a16="http://schemas.microsoft.com/office/drawing/2014/main" id="{C1262155-D2C1-EA69-7DCB-DA63B00D7AB1}"/>
               </a:ext>
             </a:extLst>
           </p:cNvPr>
@@ -4544,7 +4547,7 @@
             <a:hlinkClick r:id="" action="ppaction://media"/>
             <a:extLst>
               <a:ext uri="{FF2B5EF4-FFF2-40B4-BE49-F238E27FC236}">
-                <a16:creationId xmlns:a16="http://schemas.microsoft.com/office/drawing/2014/main" id="{E806F899-D395-7565-0AC1-8D91FBD5598A}"/>
+                <a16:creationId xmlns:a16="http://schemas.microsoft.com/office/drawing/2014/main" id="{81A9F259-5D35-4A74-FAF3-A619FDC9187B}"/>
               </a:ext>
             </a:extLst>
           </p:cNvPr>
@@ -4579,7 +4582,7 @@
     </p:spTree>
     <p:extLst>
       <p:ext uri="{BB962C8B-B14F-4D97-AF65-F5344CB8AC3E}">
-        <p14:creationId xmlns:p14="http://schemas.microsoft.com/office/powerpoint/2010/main" val="3110446156"/>
+        <p14:creationId xmlns:p14="http://schemas.microsoft.com/office/powerpoint/2010/main" val="1961071683"/>
       </p:ext>
     </p:extLst>
   </p:cSld>
@@ -4703,7 +4706,7 @@
           <p:cNvPr id="2" name="テキスト ボックス 1">
             <a:extLst>
               <a:ext uri="{FF2B5EF4-FFF2-40B4-BE49-F238E27FC236}">
-                <a16:creationId xmlns:a16="http://schemas.microsoft.com/office/drawing/2014/main" id="{B0574A0B-3FB8-4093-1066-E4EF9C2D6E49}"/>
+                <a16:creationId xmlns:a16="http://schemas.microsoft.com/office/drawing/2014/main" id="{927356B2-60EC-D0D8-5398-9CF615A6D09E}"/>
               </a:ext>
             </a:extLst>
           </p:cNvPr>
@@ -4749,7 +4752,7 @@
           <p:cNvPr id="3" name="テキスト ボックス 2">
             <a:extLst>
               <a:ext uri="{FF2B5EF4-FFF2-40B4-BE49-F238E27FC236}">
-                <a16:creationId xmlns:a16="http://schemas.microsoft.com/office/drawing/2014/main" id="{A87EEC2C-194A-91DE-7203-E46868B0C684}"/>
+                <a16:creationId xmlns:a16="http://schemas.microsoft.com/office/drawing/2014/main" id="{968EEB9F-E5F3-B9F4-0CBA-B456E4DFC5CE}"/>
               </a:ext>
             </a:extLst>
           </p:cNvPr>
@@ -4789,7 +4792,7 @@
           <p:cNvPr id="4" name="テキスト ボックス 3">
             <a:extLst>
               <a:ext uri="{FF2B5EF4-FFF2-40B4-BE49-F238E27FC236}">
-                <a16:creationId xmlns:a16="http://schemas.microsoft.com/office/drawing/2014/main" id="{6A7545F3-5A55-3E50-CE59-1DBF4CFD72EE}"/>
+                <a16:creationId xmlns:a16="http://schemas.microsoft.com/office/drawing/2014/main" id="{026D8A4D-9857-7B71-B571-E5D1D89AD3C6}"/>
               </a:ext>
             </a:extLst>
           </p:cNvPr>
@@ -4899,7 +4902,7 @@
           <p:cNvPr id="5" name="テキスト ボックス 4">
             <a:extLst>
               <a:ext uri="{FF2B5EF4-FFF2-40B4-BE49-F238E27FC236}">
-                <a16:creationId xmlns:a16="http://schemas.microsoft.com/office/drawing/2014/main" id="{A7A244A2-9509-725E-81E0-EFE2A4687D64}"/>
+                <a16:creationId xmlns:a16="http://schemas.microsoft.com/office/drawing/2014/main" id="{F478D52C-B6F9-972C-3947-BC952D128AAE}"/>
               </a:ext>
             </a:extLst>
           </p:cNvPr>
@@ -4946,7 +4949,7 @@
             <a:hlinkClick r:id="" action="ppaction://media"/>
             <a:extLst>
               <a:ext uri="{FF2B5EF4-FFF2-40B4-BE49-F238E27FC236}">
-                <a16:creationId xmlns:a16="http://schemas.microsoft.com/office/drawing/2014/main" id="{11A337BC-5FDC-7D14-626F-ED68DD24EFF6}"/>
+                <a16:creationId xmlns:a16="http://schemas.microsoft.com/office/drawing/2014/main" id="{7C132657-D92D-1E06-E6AA-636A93EA090E}"/>
               </a:ext>
             </a:extLst>
           </p:cNvPr>
@@ -4981,7 +4984,7 @@
     </p:spTree>
     <p:extLst>
       <p:ext uri="{BB962C8B-B14F-4D97-AF65-F5344CB8AC3E}">
-        <p14:creationId xmlns:p14="http://schemas.microsoft.com/office/powerpoint/2010/main" val="887837869"/>
+        <p14:creationId xmlns:p14="http://schemas.microsoft.com/office/powerpoint/2010/main" val="2561248872"/>
       </p:ext>
     </p:extLst>
   </p:cSld>
@@ -5105,7 +5108,7 @@
           <p:cNvPr id="2" name="テキスト ボックス 1">
             <a:extLst>
               <a:ext uri="{FF2B5EF4-FFF2-40B4-BE49-F238E27FC236}">
-                <a16:creationId xmlns:a16="http://schemas.microsoft.com/office/drawing/2014/main" id="{32E686D4-DDD9-CBE9-CC47-1CEB15B2CEF0}"/>
+                <a16:creationId xmlns:a16="http://schemas.microsoft.com/office/drawing/2014/main" id="{22299355-2BFF-4097-DE7B-AA5F4402A349}"/>
               </a:ext>
             </a:extLst>
           </p:cNvPr>
@@ -5151,7 +5154,7 @@
           <p:cNvPr id="3" name="テキスト ボックス 2">
             <a:extLst>
               <a:ext uri="{FF2B5EF4-FFF2-40B4-BE49-F238E27FC236}">
-                <a16:creationId xmlns:a16="http://schemas.microsoft.com/office/drawing/2014/main" id="{96C5CC8B-80D4-12EA-7CAE-BF7304A3776F}"/>
+                <a16:creationId xmlns:a16="http://schemas.microsoft.com/office/drawing/2014/main" id="{C2914952-7675-194A-D625-F7C8BAB97B96}"/>
               </a:ext>
             </a:extLst>
           </p:cNvPr>
@@ -5191,7 +5194,7 @@
           <p:cNvPr id="4" name="テキスト ボックス 3">
             <a:extLst>
               <a:ext uri="{FF2B5EF4-FFF2-40B4-BE49-F238E27FC236}">
-                <a16:creationId xmlns:a16="http://schemas.microsoft.com/office/drawing/2014/main" id="{8ED521D8-4F5F-885B-F5B4-067F8359A346}"/>
+                <a16:creationId xmlns:a16="http://schemas.microsoft.com/office/drawing/2014/main" id="{AC7C9EDB-1FEC-5B80-0650-7252CB048A6A}"/>
               </a:ext>
             </a:extLst>
           </p:cNvPr>
@@ -5215,20 +5218,14 @@
           <a:lstStyle/>
           <a:p>
             <a:r>
-              <a:rPr kumimoji="1" lang="en-US" altLang="ja-JP" sz="2000">
+              <a:rPr kumimoji="1" lang="ja-JP" altLang="en-US" sz="2000">
                 <a:solidFill>
                   <a:srgbClr val="333333"/>
                 </a:solidFill>
                 <a:latin typeface="Arial" panose="020B0604020202020204" pitchFamily="34" charset="0"/>
               </a:rPr>
-              <a:t>$(cat &lt;&lt;'EOF'</a:t>
-            </a:r>
-            <a:endParaRPr kumimoji="1" lang="ja-JP" altLang="en-US" sz="2000">
-              <a:solidFill>
-                <a:srgbClr val="333333"/>
-              </a:solidFill>
-              <a:latin typeface="Arial" panose="020B0604020202020204" pitchFamily="34" charset="0"/>
-            </a:endParaRPr>
+              <a:t>直近のコミットでは、実装の見直しと継続的な改善が行われました。</a:t>
+            </a:r>
           </a:p>
         </p:txBody>
       </p:sp>
@@ -5237,7 +5234,7 @@
           <p:cNvPr id="5" name="テキスト ボックス 4">
             <a:extLst>
               <a:ext uri="{FF2B5EF4-FFF2-40B4-BE49-F238E27FC236}">
-                <a16:creationId xmlns:a16="http://schemas.microsoft.com/office/drawing/2014/main" id="{5D712120-DA7E-9D0A-8230-BE9DA69544B3}"/>
+                <a16:creationId xmlns:a16="http://schemas.microsoft.com/office/drawing/2014/main" id="{5CFAF1E2-BD4E-2AE3-4A15-4AF94F05E009}"/>
               </a:ext>
             </a:extLst>
           </p:cNvPr>
@@ -5284,7 +5281,7 @@
             <a:hlinkClick r:id="" action="ppaction://media"/>
             <a:extLst>
               <a:ext uri="{FF2B5EF4-FFF2-40B4-BE49-F238E27FC236}">
-                <a16:creationId xmlns:a16="http://schemas.microsoft.com/office/drawing/2014/main" id="{538AB1F1-C892-569E-17EF-7ECBC696D4BD}"/>
+                <a16:creationId xmlns:a16="http://schemas.microsoft.com/office/drawing/2014/main" id="{A217EDEE-F917-6B3A-B59D-20F12D6ABD4C}"/>
               </a:ext>
             </a:extLst>
           </p:cNvPr>
@@ -5319,7 +5316,7 @@
     </p:spTree>
     <p:extLst>
       <p:ext uri="{BB962C8B-B14F-4D97-AF65-F5344CB8AC3E}">
-        <p14:creationId xmlns:p14="http://schemas.microsoft.com/office/powerpoint/2010/main" val="3638712012"/>
+        <p14:creationId xmlns:p14="http://schemas.microsoft.com/office/powerpoint/2010/main" val="414352127"/>
       </p:ext>
     </p:extLst>
   </p:cSld>
@@ -5328,10 +5325,10 @@
   </p:clrMapOvr>
   <mc:AlternateContent xmlns:mc="http://schemas.openxmlformats.org/markup-compatibility/2006">
     <mc:Choice xmlns:p14="http://schemas.microsoft.com/office/powerpoint/2010/main" Requires="p14">
-      <p:transition spd="slow" p14:dur="2000" advTm="9000"/>
+      <p:transition spd="slow" p14:dur="2000" advTm="7000"/>
     </mc:Choice>
     <mc:Fallback>
-      <p:transition spd="slow" advTm="9000"/>
+      <p:transition spd="slow" advTm="7000"/>
     </mc:Fallback>
   </mc:AlternateContent>
   <p:timing>
@@ -5362,7 +5359,7 @@
                                   <p:childTnLst>
                                     <p:cmd type="call" cmd="playFrom(0.0)">
                                       <p:cBhvr>
-                                        <p:cTn id="6" dur="8006" fill="hold"/>
+                                        <p:cTn id="6" dur="6076" fill="hold"/>
                                         <p:tgtEl>
                                           <p:spTgt spid="6"/>
                                         </p:tgtEl>
@@ -5443,7 +5440,7 @@
           <p:cNvPr id="2" name="テキスト ボックス 1">
             <a:extLst>
               <a:ext uri="{FF2B5EF4-FFF2-40B4-BE49-F238E27FC236}">
-                <a16:creationId xmlns:a16="http://schemas.microsoft.com/office/drawing/2014/main" id="{82D862A1-FA6E-C6E9-27F6-E1F8EEBF9855}"/>
+                <a16:creationId xmlns:a16="http://schemas.microsoft.com/office/drawing/2014/main" id="{F00E13A2-E3D1-0150-5B65-ED7917829DD4}"/>
               </a:ext>
             </a:extLst>
           </p:cNvPr>
@@ -5489,7 +5486,7 @@
           <p:cNvPr id="3" name="テキスト ボックス 2">
             <a:extLst>
               <a:ext uri="{FF2B5EF4-FFF2-40B4-BE49-F238E27FC236}">
-                <a16:creationId xmlns:a16="http://schemas.microsoft.com/office/drawing/2014/main" id="{9D859AAF-5472-048B-D350-508E97AAD100}"/>
+                <a16:creationId xmlns:a16="http://schemas.microsoft.com/office/drawing/2014/main" id="{D16B5E0C-4F2E-5AEB-A388-B005176F600F}"/>
               </a:ext>
             </a:extLst>
           </p:cNvPr>
@@ -5529,7 +5526,7 @@
           <p:cNvPr id="4" name="テキスト ボックス 3">
             <a:extLst>
               <a:ext uri="{FF2B5EF4-FFF2-40B4-BE49-F238E27FC236}">
-                <a16:creationId xmlns:a16="http://schemas.microsoft.com/office/drawing/2014/main" id="{FB2B0DD6-0378-AE50-91DE-9EFAF32A27F3}"/>
+                <a16:creationId xmlns:a16="http://schemas.microsoft.com/office/drawing/2014/main" id="{E0E960E8-E2D7-0E50-39C1-5DADE6EEEDCD}"/>
               </a:ext>
             </a:extLst>
           </p:cNvPr>
@@ -5594,7 +5591,7 @@
           <p:cNvPr id="5" name="テキスト ボックス 4">
             <a:extLst>
               <a:ext uri="{FF2B5EF4-FFF2-40B4-BE49-F238E27FC236}">
-                <a16:creationId xmlns:a16="http://schemas.microsoft.com/office/drawing/2014/main" id="{33CD32BF-0519-05A4-1D0E-EF9787772214}"/>
+                <a16:creationId xmlns:a16="http://schemas.microsoft.com/office/drawing/2014/main" id="{151E8439-257F-809D-20D1-CD7DCDF6B8DA}"/>
               </a:ext>
             </a:extLst>
           </p:cNvPr>
@@ -5641,7 +5638,7 @@
             <a:hlinkClick r:id="" action="ppaction://media"/>
             <a:extLst>
               <a:ext uri="{FF2B5EF4-FFF2-40B4-BE49-F238E27FC236}">
-                <a16:creationId xmlns:a16="http://schemas.microsoft.com/office/drawing/2014/main" id="{55ED783B-7A0E-0753-AC3A-D65B5E2C89EA}"/>
+                <a16:creationId xmlns:a16="http://schemas.microsoft.com/office/drawing/2014/main" id="{846D64AB-398A-6BE7-0A28-7AEFF7EFA559}"/>
               </a:ext>
             </a:extLst>
           </p:cNvPr>
@@ -5676,7 +5673,7 @@
     </p:spTree>
     <p:extLst>
       <p:ext uri="{BB962C8B-B14F-4D97-AF65-F5344CB8AC3E}">
-        <p14:creationId xmlns:p14="http://schemas.microsoft.com/office/powerpoint/2010/main" val="13362539"/>
+        <p14:creationId xmlns:p14="http://schemas.microsoft.com/office/powerpoint/2010/main" val="2133796032"/>
       </p:ext>
     </p:extLst>
   </p:cSld>
